--- a/materialien/Videos/06_ER_zu_Relationenschema/DD_Video06_ER_zu_Relationenschema_Folien.pptx
+++ b/materialien/Videos/06_ER_zu_Relationenschema/DD_Video06_ER_zu_Relationenschema_Folien.pptx
@@ -1290,7 +1290,7 @@
           <a:lstStyle/>
           <a:p>
             <a:r>
-              <a:t>Jetzt du. Hier das Futter-Modell aus dem letzten Video: Lieferant liefert Futtersorte, Tier frisst Futtersorte mit einer Tagesmenge. Überführe es in ein Relationenschema in Kurzschreibweise. Welche Regel gilt bei liefert, welche bei frisst? Halte das Video an.</a:t>
+              <a:t>Jetzt du. Hier das Futter-Modell aus dem letzten Video: Lieferant liefert Futtersorte, Tier frisst Futtersorte mit einer Tagesmenge. Erstelle dazu das Relationenschema in Kurzschreibweise. Welche Regel gilt bei liefert, welche bei frisst? Halte das Video an.</a:t>
             </a:r>
           </a:p>
         </p:txBody>
@@ -13200,7 +13200,7 @@
                 </a:solidFill>
                 <a:latin typeface="Barlow"/>
               </a:rPr>
-              <a:t>Überführe</a:t>
+              <a:t>Erstelle</a:t>
             </a:r>
             <a:r>
               <a:rPr sz="2000" b="0" i="0" u="none">
@@ -13209,7 +13209,7 @@
                 </a:solidFill>
                 <a:latin typeface="Barlow"/>
               </a:rPr>
-              <a:t> das ER-Modell aus Video 5 in ein Relationenschema in Kurzschreibweise – mit Primärschlüsseln (unterstrichen) und Fremdschlüsseln (</a:t>
+              <a:t> zu dem ER-Modell aus Video 5 das Relationenschema in Kurzschreibweise – mit Primärschlüsseln (unterstrichen) und Fremdschlüsseln (</a:t>
             </a:r>
             <a:r>
               <a:rPr sz="2000" b="0" i="0" u="none">
